--- a/Modul Minna 2/Bab 37/37. Minna 2 Tata Bahasa Bab 37 - Slide.pptx
+++ b/Modul Minna 2/Bab 37/37. Minna 2 Tata Bahasa Bab 37 - Slide.pptx
@@ -4181,7 +4181,7 @@
                 <a:ea typeface="Arial" pitchFamily="34" charset="-122"/>
                 <a:cs typeface="Arial" pitchFamily="34" charset="-120"/>
               </a:rPr>
-              <a:t>おおさかでてんらんかいがひらかれました。</a:t>
+              <a:t>スラバヤでてんらんかいがひらかれました。</a:t>
             </a:r>
             <a:endParaRPr lang="en-US" sz="1700" dirty="0"/>
           </a:p>
@@ -4220,7 +4220,7 @@
                 <a:ea typeface="Arial" pitchFamily="34" charset="-122"/>
                 <a:cs typeface="Arial" pitchFamily="34" charset="-120"/>
               </a:rPr>
-              <a:t>Oosaka de tenrankai ga hirakaremashita</a:t>
+              <a:t>Surabaya de tenrankai ga hirakaremashita</a:t>
             </a:r>
             <a:pPr indent="0" marL="0">
               <a:buNone/>
@@ -4248,7 +4248,7 @@
                 <a:ea typeface="Arial" pitchFamily="34" charset="-122"/>
                 <a:cs typeface="Arial" pitchFamily="34" charset="-120"/>
               </a:rPr>
-              <a:t>Di Osaka diadakan pameran.</a:t>
+              <a:t>Di Surabaya diadakan pameran.</a:t>
             </a:r>
             <a:endParaRPr lang="en-US" sz="950" dirty="0"/>
           </a:p>
